--- a/FAO_datalab_restitution.pptx
+++ b/FAO_datalab_restitution.pptx
@@ -6312,7 +6312,7 @@
         <p:spPr>
           <a:xfrm>
             <a:off x="6126480" y="1234440"/>
-            <a:ext cx="5394960" cy="4754880"/>
+            <a:ext cx="5394960" cy="2979751"/>
           </a:xfrm>
           <a:prstGeom prst="rect">
             <a:avLst/>
@@ -7237,57 +7237,6 @@
       </p:graphicFrame>
       <p:sp>
         <p:nvSpPr>
-          <p:cNvPr id="17" name="Shape 11"/>
-          <p:cNvSpPr/>
-          <p:nvPr/>
-        </p:nvSpPr>
-        <p:spPr>
-          <a:xfrm>
-            <a:off x="6446520" y="3977640"/>
-            <a:ext cx="365760" cy="365760"/>
-          </a:xfrm>
-          <a:prstGeom prst="ellipse">
-            <a:avLst/>
-          </a:prstGeom>
-          <a:solidFill>
-            <a:srgbClr val="0B3D5C"/>
-          </a:solidFill>
-          <a:ln/>
-        </p:spPr>
-        <p:txBody>
-          <a:bodyPr/>
-          <a:lstStyle/>
-          <a:p>
-            <a:endParaRPr lang="fr-FR"/>
-          </a:p>
-        </p:txBody>
-      </p:sp>
-      <p:pic>
-        <p:nvPicPr>
-          <p:cNvPr id="18" name="Image 3" descr="bulb.png"/>
-          <p:cNvPicPr>
-            <a:picLocks noChangeAspect="1"/>
-          </p:cNvPicPr>
-          <p:nvPr/>
-        </p:nvPicPr>
-        <p:blipFill>
-          <a:blip r:embed="rId4"/>
-          <a:stretch>
-            <a:fillRect/>
-          </a:stretch>
-        </p:blipFill>
-        <p:spPr>
-          <a:xfrm>
-            <a:off x="6534302" y="4065422"/>
-            <a:ext cx="190195" cy="190195"/>
-          </a:xfrm>
-          <a:prstGeom prst="rect">
-            <a:avLst/>
-          </a:prstGeom>
-        </p:spPr>
-      </p:pic>
-      <p:sp>
-        <p:nvSpPr>
           <p:cNvPr id="19" name="Text 12"/>
           <p:cNvSpPr/>
           <p:nvPr/>
@@ -7310,17 +7259,6 @@
             <a:pPr marL="0" indent="0">
               <a:buNone/>
             </a:pPr>
-            <a:r>
-              <a:rPr lang="en-US" sz="1200" dirty="0">
-                <a:solidFill>
-                  <a:srgbClr val="0D3049"/>
-                </a:solidFill>
-                <a:latin typeface="Calibri" pitchFamily="34" charset="0"/>
-                <a:ea typeface="Calibri" pitchFamily="34" charset="-122"/>
-                <a:cs typeface="Calibri" pitchFamily="34" charset="-120"/>
-              </a:rPr>
-              <a:t>Résultats à compléter après exécution du notebook FAO_datalab_modelisation.ipynb (section 4). Le modèle retenu pour l'imputation est celui offrant le meilleur compromis R² moyen / stabilité (écart-type faible en validation croisée).</a:t>
-            </a:r>
             <a:endParaRPr lang="en-US" sz="1200" dirty="0"/>
           </a:p>
         </p:txBody>
@@ -7379,7 +7317,7 @@
           <p:nvPr/>
         </p:nvPicPr>
         <p:blipFill>
-          <a:blip r:embed="rId5"/>
+          <a:blip r:embed="rId4"/>
           <a:stretch>
             <a:fillRect/>
           </a:stretch>

--- a/FAO_datalab_restitution.pptx
+++ b/FAO_datalab_restitution.pptx
@@ -2662,7 +2662,7 @@
                 <a:ea typeface="Calibri" pitchFamily="34" charset="-122"/>
                 <a:cs typeface="Calibri" pitchFamily="34" charset="-120"/>
               </a:rPr>
-              <a:t>pays dans le dataset final</a:t>
+              <a:t> dans le dataset global</a:t>
             </a:r>
             <a:endParaRPr lang="en-US" sz="1300" dirty="0"/>
           </a:p>
